--- a/src/ppt-super/assets/tpl-20-summary-next/template.pptx
+++ b/src/ppt-super/assets/tpl-20-summary-next/template.pptx
@@ -3136,7 +3136,14 @@
           <a:bodyPr rtlCol="0" anchor="ctr"/>
           <a:lstStyle/>
           <a:p>
-            <a:pPr algn="ctr"/>
+            <a:pPr algn="ctr">
+              <a:spcBef>
+                <a:spcPts val="0"/>
+              </a:spcBef>
+              <a:spcAft>
+                <a:spcPts val="0"/>
+              </a:spcAft>
+            </a:pPr>
           </a:p>
         </p:txBody>
       </p:sp>
@@ -3166,14 +3173,21 @@
               <a:lnSpc>
                 <a:spcPct val="112000"/>
               </a:lnSpc>
+              <a:spcBef>
+                <a:spcPts val="0"/>
+              </a:spcBef>
+              <a:spcAft>
+                <a:spcPts val="0"/>
+              </a:spcAft>
             </a:pPr>
             <a:r>
-              <a:rPr sz="1400" b="1" i="0">
+              <a:rPr sz="1400" b="1" i="0" lang="zh-CN" altLang="zh-CN">
                 <a:solidFill>
                   <a:srgbClr val="FFFFFF"/>
                 </a:solidFill>
                 <a:latin typeface="Microsoft YaHei"/>
                 <a:ea typeface="Microsoft YaHei"/>
+                <a:cs typeface="Microsoft YaHei"/>
               </a:rPr>
               <a:t>总结展望</a:t>
             </a:r>
@@ -3206,14 +3220,21 @@
               <a:lnSpc>
                 <a:spcPct val="112000"/>
               </a:lnSpc>
+              <a:spcBef>
+                <a:spcPts val="0"/>
+              </a:spcBef>
+              <a:spcAft>
+                <a:spcPts val="0"/>
+              </a:spcAft>
             </a:pPr>
             <a:r>
-              <a:rPr sz="2200" b="1" i="0">
+              <a:rPr sz="2200" b="1" i="0" lang="zh-CN" altLang="zh-CN">
                 <a:solidFill>
                   <a:srgbClr val="B90A0A"/>
                 </a:solidFill>
                 <a:latin typeface="Microsoft YaHei"/>
                 <a:ea typeface="Microsoft YaHei"/>
+                <a:cs typeface="Microsoft YaHei"/>
               </a:rPr>
               <a:t>全年训练效率提升 3 倍, 下半年聚焦集群二期与生态适配</a:t>
             </a:r>
@@ -3298,7 +3319,14 @@
           <a:bodyPr rtlCol="0" anchor="ctr"/>
           <a:lstStyle/>
           <a:p>
-            <a:pPr algn="ctr"/>
+            <a:pPr algn="ctr">
+              <a:spcBef>
+                <a:spcPts val="0"/>
+              </a:spcBef>
+              <a:spcAft>
+                <a:spcPts val="0"/>
+              </a:spcAft>
+            </a:pPr>
           </a:p>
         </p:txBody>
       </p:sp>
@@ -3342,7 +3370,14 @@
           <a:bodyPr rtlCol="0" anchor="ctr"/>
           <a:lstStyle/>
           <a:p>
-            <a:pPr algn="ctr"/>
+            <a:pPr algn="ctr">
+              <a:spcBef>
+                <a:spcPts val="0"/>
+              </a:spcBef>
+              <a:spcAft>
+                <a:spcPts val="0"/>
+              </a:spcAft>
+            </a:pPr>
           </a:p>
         </p:txBody>
       </p:sp>
@@ -3372,14 +3407,21 @@
               <a:lnSpc>
                 <a:spcPct val="112000"/>
               </a:lnSpc>
+              <a:spcBef>
+                <a:spcPts val="0"/>
+              </a:spcBef>
+              <a:spcAft>
+                <a:spcPts val="0"/>
+              </a:spcAft>
             </a:pPr>
             <a:r>
-              <a:rPr sz="1500" b="1" i="0">
+              <a:rPr sz="1500" b="1" i="0" lang="zh-CN" altLang="zh-CN">
                 <a:solidFill>
                   <a:srgbClr val="262626"/>
                 </a:solidFill>
                 <a:latin typeface="Microsoft YaHei"/>
                 <a:ea typeface="Microsoft YaHei"/>
+                <a:cs typeface="Microsoft YaHei"/>
               </a:rPr>
               <a:t>核心结论</a:t>
             </a:r>
@@ -3428,7 +3470,14 @@
           <a:bodyPr rtlCol="0" anchor="ctr"/>
           <a:lstStyle/>
           <a:p>
-            <a:pPr algn="ctr"/>
+            <a:pPr algn="ctr">
+              <a:spcBef>
+                <a:spcPts val="0"/>
+              </a:spcBef>
+              <a:spcAft>
+                <a:spcPts val="0"/>
+              </a:spcAft>
+            </a:pPr>
           </a:p>
         </p:txBody>
       </p:sp>
@@ -3472,7 +3521,14 @@
           <a:bodyPr rtlCol="0" anchor="ctr"/>
           <a:lstStyle/>
           <a:p>
-            <a:pPr algn="ctr"/>
+            <a:pPr algn="ctr">
+              <a:spcBef>
+                <a:spcPts val="0"/>
+              </a:spcBef>
+              <a:spcAft>
+                <a:spcPts val="0"/>
+              </a:spcAft>
+            </a:pPr>
           </a:p>
         </p:txBody>
       </p:sp>
@@ -3502,14 +3558,21 @@
               <a:lnSpc>
                 <a:spcPct val="112000"/>
               </a:lnSpc>
+              <a:spcBef>
+                <a:spcPts val="0"/>
+              </a:spcBef>
+              <a:spcAft>
+                <a:spcPts val="0"/>
+              </a:spcAft>
             </a:pPr>
             <a:r>
-              <a:rPr sz="1600" b="1" i="0">
+              <a:rPr sz="1600" b="1" i="0" lang="zh-CN" altLang="zh-CN">
                 <a:solidFill>
                   <a:srgbClr val="FFFFFF"/>
                 </a:solidFill>
                 <a:latin typeface="Microsoft YaHei"/>
                 <a:ea typeface="Microsoft YaHei"/>
+                <a:cs typeface="Microsoft YaHei"/>
               </a:rPr>
               <a:t>01</a:t>
             </a:r>
@@ -3524,8 +3587,8 @@
         </p:nvSpPr>
         <p:spPr>
           <a:xfrm>
-            <a:off x="1143000" y="1295400"/>
-            <a:ext cx="5207000" cy="444500"/>
+            <a:off x="1143000" y="1276286"/>
+            <a:ext cx="5207000" cy="482727"/>
           </a:xfrm>
           <a:prstGeom prst="rect">
             <a:avLst/>
@@ -3542,14 +3605,21 @@
               <a:lnSpc>
                 <a:spcPct val="112000"/>
               </a:lnSpc>
+              <a:spcBef>
+                <a:spcPts val="0"/>
+              </a:spcBef>
+              <a:spcAft>
+                <a:spcPts val="0"/>
+              </a:spcAft>
             </a:pPr>
             <a:r>
-              <a:rPr sz="1400" b="1" i="0">
+              <a:rPr sz="1400" b="1" i="0" lang="zh-CN" altLang="zh-CN">
                 <a:solidFill>
                   <a:srgbClr val="262626"/>
                 </a:solidFill>
                 <a:latin typeface="Microsoft YaHei"/>
                 <a:ea typeface="Microsoft YaHei"/>
+                <a:cs typeface="Microsoft YaHei"/>
               </a:rPr>
               <a:t>昇腾千卡集群按期投产, 训练任务迁移完成率 95%</a:t>
             </a:r>
@@ -3618,14 +3688,21 @@
               <a:lnSpc>
                 <a:spcPct val="112000"/>
               </a:lnSpc>
+              <a:spcBef>
+                <a:spcPts val="0"/>
+              </a:spcBef>
+              <a:spcAft>
+                <a:spcPts val="0"/>
+              </a:spcAft>
             </a:pPr>
             <a:r>
-              <a:rPr sz="1050" b="0" i="0">
+              <a:rPr sz="1050" b="0" i="0" lang="zh-CN" altLang="zh-CN">
                 <a:solidFill>
                   <a:srgbClr val="595959"/>
                 </a:solidFill>
                 <a:latin typeface="Microsoft YaHei"/>
                 <a:ea typeface="Microsoft YaHei"/>
+                <a:cs typeface="Microsoft YaHei"/>
               </a:rPr>
               <a:t>支撑 12 个大模型项目, 累计训练 18.6 万卡时, 集群故障率低于 0.5%, 千卡作业最长稳定运行 42 天, 算力交付满足全部在研项目排期</a:t>
             </a:r>
@@ -3674,7 +3751,14 @@
           <a:bodyPr rtlCol="0" anchor="ctr"/>
           <a:lstStyle/>
           <a:p>
-            <a:pPr algn="ctr"/>
+            <a:pPr algn="ctr">
+              <a:spcBef>
+                <a:spcPts val="0"/>
+              </a:spcBef>
+              <a:spcAft>
+                <a:spcPts val="0"/>
+              </a:spcAft>
+            </a:pPr>
           </a:p>
         </p:txBody>
       </p:sp>
@@ -3718,7 +3802,14 @@
           <a:bodyPr rtlCol="0" anchor="ctr"/>
           <a:lstStyle/>
           <a:p>
-            <a:pPr algn="ctr"/>
+            <a:pPr algn="ctr">
+              <a:spcBef>
+                <a:spcPts val="0"/>
+              </a:spcBef>
+              <a:spcAft>
+                <a:spcPts val="0"/>
+              </a:spcAft>
+            </a:pPr>
           </a:p>
         </p:txBody>
       </p:sp>
@@ -3748,14 +3839,21 @@
               <a:lnSpc>
                 <a:spcPct val="112000"/>
               </a:lnSpc>
+              <a:spcBef>
+                <a:spcPts val="0"/>
+              </a:spcBef>
+              <a:spcAft>
+                <a:spcPts val="0"/>
+              </a:spcAft>
             </a:pPr>
             <a:r>
-              <a:rPr sz="1600" b="1" i="0">
+              <a:rPr sz="1600" b="1" i="0" lang="zh-CN" altLang="zh-CN">
                 <a:solidFill>
                   <a:srgbClr val="FFFFFF"/>
                 </a:solidFill>
                 <a:latin typeface="Microsoft YaHei"/>
                 <a:ea typeface="Microsoft YaHei"/>
+                <a:cs typeface="Microsoft YaHei"/>
               </a:rPr>
               <a:t>02</a:t>
             </a:r>
@@ -3770,8 +3868,8 @@
         </p:nvSpPr>
         <p:spPr>
           <a:xfrm>
-            <a:off x="1143000" y="2603500"/>
-            <a:ext cx="5207000" cy="444500"/>
+            <a:off x="1143000" y="2584386"/>
+            <a:ext cx="5207000" cy="482727"/>
           </a:xfrm>
           <a:prstGeom prst="rect">
             <a:avLst/>
@@ -3788,14 +3886,21 @@
               <a:lnSpc>
                 <a:spcPct val="112000"/>
               </a:lnSpc>
+              <a:spcBef>
+                <a:spcPts val="0"/>
+              </a:spcBef>
+              <a:spcAft>
+                <a:spcPts val="0"/>
+              </a:spcAft>
             </a:pPr>
             <a:r>
-              <a:rPr sz="1400" b="1" i="0">
+              <a:rPr sz="1400" b="1" i="0" lang="zh-CN" altLang="zh-CN">
                 <a:solidFill>
                   <a:srgbClr val="262626"/>
                 </a:solidFill>
                 <a:latin typeface="Microsoft YaHei"/>
                 <a:ea typeface="Microsoft YaHei"/>
+                <a:cs typeface="Microsoft YaHei"/>
               </a:rPr>
               <a:t>算子生态适配突破, 主流框架覆盖率达 92%</a:t>
             </a:r>
@@ -3864,14 +3969,21 @@
               <a:lnSpc>
                 <a:spcPct val="112000"/>
               </a:lnSpc>
+              <a:spcBef>
+                <a:spcPts val="0"/>
+              </a:spcBef>
+              <a:spcAft>
+                <a:spcPts val="0"/>
+              </a:spcAft>
             </a:pPr>
             <a:r>
-              <a:rPr sz="1050" b="0" i="0">
+              <a:rPr sz="1050" b="0" i="0" lang="zh-CN" altLang="zh-CN">
                 <a:solidFill>
                   <a:srgbClr val="595959"/>
                 </a:solidFill>
                 <a:latin typeface="Microsoft YaHei"/>
                 <a:ea typeface="Microsoft YaHei"/>
+                <a:cs typeface="Microsoft YaHei"/>
               </a:rPr>
               <a:t>完成 PyTorch/MindSpore 双栈 480 个高频算子适配, 典型模型性能达 A100 的 0.9-1.1 倍, 长尾算子仅余 8% 待 Q3 攻关收尾</a:t>
             </a:r>
@@ -3920,7 +4032,14 @@
           <a:bodyPr rtlCol="0" anchor="ctr"/>
           <a:lstStyle/>
           <a:p>
-            <a:pPr algn="ctr"/>
+            <a:pPr algn="ctr">
+              <a:spcBef>
+                <a:spcPts val="0"/>
+              </a:spcBef>
+              <a:spcAft>
+                <a:spcPts val="0"/>
+              </a:spcAft>
+            </a:pPr>
           </a:p>
         </p:txBody>
       </p:sp>
@@ -3964,7 +4083,14 @@
           <a:bodyPr rtlCol="0" anchor="ctr"/>
           <a:lstStyle/>
           <a:p>
-            <a:pPr algn="ctr"/>
+            <a:pPr algn="ctr">
+              <a:spcBef>
+                <a:spcPts val="0"/>
+              </a:spcBef>
+              <a:spcAft>
+                <a:spcPts val="0"/>
+              </a:spcAft>
+            </a:pPr>
           </a:p>
         </p:txBody>
       </p:sp>
@@ -3994,14 +4120,21 @@
               <a:lnSpc>
                 <a:spcPct val="112000"/>
               </a:lnSpc>
+              <a:spcBef>
+                <a:spcPts val="0"/>
+              </a:spcBef>
+              <a:spcAft>
+                <a:spcPts val="0"/>
+              </a:spcAft>
             </a:pPr>
             <a:r>
-              <a:rPr sz="1600" b="1" i="0">
+              <a:rPr sz="1600" b="1" i="0" lang="zh-CN" altLang="zh-CN">
                 <a:solidFill>
                   <a:srgbClr val="FFFFFF"/>
                 </a:solidFill>
                 <a:latin typeface="Microsoft YaHei"/>
                 <a:ea typeface="Microsoft YaHei"/>
+                <a:cs typeface="Microsoft YaHei"/>
               </a:rPr>
               <a:t>03</a:t>
             </a:r>
@@ -4016,8 +4149,8 @@
         </p:nvSpPr>
         <p:spPr>
           <a:xfrm>
-            <a:off x="1143000" y="3911600"/>
-            <a:ext cx="5207000" cy="444500"/>
+            <a:off x="1143000" y="3892486"/>
+            <a:ext cx="5207000" cy="482727"/>
           </a:xfrm>
           <a:prstGeom prst="rect">
             <a:avLst/>
@@ -4034,14 +4167,21 @@
               <a:lnSpc>
                 <a:spcPct val="112000"/>
               </a:lnSpc>
+              <a:spcBef>
+                <a:spcPts val="0"/>
+              </a:spcBef>
+              <a:spcAft>
+                <a:spcPts val="0"/>
+              </a:spcAft>
             </a:pPr>
             <a:r>
-              <a:rPr sz="1400" b="1" i="0">
+              <a:rPr sz="1400" b="1" i="0" lang="zh-CN" altLang="zh-CN">
                 <a:solidFill>
                   <a:srgbClr val="262626"/>
                 </a:solidFill>
                 <a:latin typeface="Microsoft YaHei"/>
                 <a:ea typeface="Microsoft YaHei"/>
+                <a:cs typeface="Microsoft YaHei"/>
               </a:rPr>
               <a:t>数据治理体系落地, 训练数据合规率 100%</a:t>
             </a:r>
@@ -4110,14 +4250,21 @@
               <a:lnSpc>
                 <a:spcPct val="112000"/>
               </a:lnSpc>
+              <a:spcBef>
+                <a:spcPts val="0"/>
+              </a:spcBef>
+              <a:spcAft>
+                <a:spcPts val="0"/>
+              </a:spcAft>
             </a:pPr>
             <a:r>
-              <a:rPr sz="1050" b="0" i="0">
+              <a:rPr sz="1050" b="0" i="0" lang="zh-CN" altLang="zh-CN">
                 <a:solidFill>
                   <a:srgbClr val="595959"/>
                 </a:solidFill>
                 <a:latin typeface="Microsoft YaHei"/>
                 <a:ea typeface="Microsoft YaHei"/>
+                <a:cs typeface="Microsoft YaHei"/>
               </a:rPr>
               <a:t>建成统一数据湖, 入湖数据 2.3PB, 自动化标注流水线使标注效率提升 40%, 训练集合规审计一次通过, 数据出境清单全部闭环</a:t>
             </a:r>
@@ -4166,7 +4313,14 @@
           <a:bodyPr rtlCol="0" anchor="ctr"/>
           <a:lstStyle/>
           <a:p>
-            <a:pPr algn="ctr"/>
+            <a:pPr algn="ctr">
+              <a:spcBef>
+                <a:spcPts val="0"/>
+              </a:spcBef>
+              <a:spcAft>
+                <a:spcPts val="0"/>
+              </a:spcAft>
+            </a:pPr>
           </a:p>
         </p:txBody>
       </p:sp>
@@ -4210,7 +4364,14 @@
           <a:bodyPr rtlCol="0" anchor="ctr"/>
           <a:lstStyle/>
           <a:p>
-            <a:pPr algn="ctr"/>
+            <a:pPr algn="ctr">
+              <a:spcBef>
+                <a:spcPts val="0"/>
+              </a:spcBef>
+              <a:spcAft>
+                <a:spcPts val="0"/>
+              </a:spcAft>
+            </a:pPr>
           </a:p>
         </p:txBody>
       </p:sp>
@@ -4240,14 +4401,21 @@
               <a:lnSpc>
                 <a:spcPct val="112000"/>
               </a:lnSpc>
+              <a:spcBef>
+                <a:spcPts val="0"/>
+              </a:spcBef>
+              <a:spcAft>
+                <a:spcPts val="0"/>
+              </a:spcAft>
             </a:pPr>
             <a:r>
-              <a:rPr sz="1600" b="1" i="0">
+              <a:rPr sz="1600" b="1" i="0" lang="zh-CN" altLang="zh-CN">
                 <a:solidFill>
                   <a:srgbClr val="FFFFFF"/>
                 </a:solidFill>
                 <a:latin typeface="Microsoft YaHei"/>
                 <a:ea typeface="Microsoft YaHei"/>
+                <a:cs typeface="Microsoft YaHei"/>
               </a:rPr>
               <a:t>04</a:t>
             </a:r>
@@ -4262,8 +4430,8 @@
         </p:nvSpPr>
         <p:spPr>
           <a:xfrm>
-            <a:off x="1143000" y="5219700"/>
-            <a:ext cx="5207000" cy="444500"/>
+            <a:off x="1143000" y="5200586"/>
+            <a:ext cx="5207000" cy="482727"/>
           </a:xfrm>
           <a:prstGeom prst="rect">
             <a:avLst/>
@@ -4280,14 +4448,21 @@
               <a:lnSpc>
                 <a:spcPct val="112000"/>
               </a:lnSpc>
+              <a:spcBef>
+                <a:spcPts val="0"/>
+              </a:spcBef>
+              <a:spcAft>
+                <a:spcPts val="0"/>
+              </a:spcAft>
             </a:pPr>
             <a:r>
-              <a:rPr sz="1400" b="1" i="0">
+              <a:rPr sz="1400" b="1" i="0" lang="zh-CN" altLang="zh-CN">
                 <a:solidFill>
                   <a:srgbClr val="262626"/>
                 </a:solidFill>
                 <a:latin typeface="Microsoft YaHei"/>
                 <a:ea typeface="Microsoft YaHei"/>
+                <a:cs typeface="Microsoft YaHei"/>
               </a:rPr>
               <a:t>智能体平台规模商用, 高频流程自动化率 65%</a:t>
             </a:r>
@@ -4356,14 +4531,21 @@
               <a:lnSpc>
                 <a:spcPct val="112000"/>
               </a:lnSpc>
+              <a:spcBef>
+                <a:spcPts val="0"/>
+              </a:spcBef>
+              <a:spcAft>
+                <a:spcPts val="0"/>
+              </a:spcAft>
             </a:pPr>
             <a:r>
-              <a:rPr sz="1050" b="0" i="0">
+              <a:rPr sz="1050" b="0" i="0" lang="zh-CN" altLang="zh-CN">
                 <a:solidFill>
                   <a:srgbClr val="595959"/>
                 </a:solidFill>
                 <a:latin typeface="Microsoft YaHei"/>
                 <a:ea typeface="Microsoft YaHei"/>
+                <a:cs typeface="Microsoft YaHei"/>
               </a:rPr>
               <a:t>接入财经/供应链/采购等 5 个业务域, 周活跃用户 1200+, 单流程平均节省 2.4 人时, 月累计释放人力 3600 人时</a:t>
             </a:r>
@@ -4410,7 +4592,14 @@
           <a:bodyPr rtlCol="0" anchor="ctr"/>
           <a:lstStyle/>
           <a:p>
-            <a:pPr algn="ctr"/>
+            <a:pPr algn="ctr">
+              <a:spcBef>
+                <a:spcPts val="0"/>
+              </a:spcBef>
+              <a:spcAft>
+                <a:spcPts val="0"/>
+              </a:spcAft>
+            </a:pPr>
           </a:p>
         </p:txBody>
       </p:sp>
@@ -4454,7 +4643,14 @@
           <a:bodyPr rtlCol="0" anchor="ctr"/>
           <a:lstStyle/>
           <a:p>
-            <a:pPr algn="ctr"/>
+            <a:pPr algn="ctr">
+              <a:spcBef>
+                <a:spcPts val="0"/>
+              </a:spcBef>
+              <a:spcAft>
+                <a:spcPts val="0"/>
+              </a:spcAft>
+            </a:pPr>
           </a:p>
         </p:txBody>
       </p:sp>
@@ -4484,14 +4680,21 @@
               <a:lnSpc>
                 <a:spcPct val="112000"/>
               </a:lnSpc>
+              <a:spcBef>
+                <a:spcPts val="0"/>
+              </a:spcBef>
+              <a:spcAft>
+                <a:spcPts val="0"/>
+              </a:spcAft>
             </a:pPr>
             <a:r>
-              <a:rPr sz="1500" b="1" i="0">
+              <a:rPr sz="1500" b="1" i="0" lang="zh-CN" altLang="zh-CN">
                 <a:solidFill>
                   <a:srgbClr val="262626"/>
                 </a:solidFill>
                 <a:latin typeface="Microsoft YaHei"/>
                 <a:ea typeface="Microsoft YaHei"/>
+                <a:cs typeface="Microsoft YaHei"/>
               </a:rPr>
               <a:t>下一步行动</a:t>
             </a:r>
@@ -4540,7 +4743,14 @@
           <a:bodyPr rtlCol="0" anchor="ctr"/>
           <a:lstStyle/>
           <a:p>
-            <a:pPr algn="ctr"/>
+            <a:pPr algn="ctr">
+              <a:spcBef>
+                <a:spcPts val="0"/>
+              </a:spcBef>
+              <a:spcAft>
+                <a:spcPts val="0"/>
+              </a:spcAft>
+            </a:pPr>
           </a:p>
         </p:txBody>
       </p:sp>
@@ -4586,7 +4796,14 @@
           <a:bodyPr rtlCol="0" anchor="ctr"/>
           <a:lstStyle/>
           <a:p>
-            <a:pPr algn="ctr"/>
+            <a:pPr algn="ctr">
+              <a:spcBef>
+                <a:spcPts val="0"/>
+              </a:spcBef>
+              <a:spcAft>
+                <a:spcPts val="0"/>
+              </a:spcAft>
+            </a:pPr>
           </a:p>
         </p:txBody>
       </p:sp>
@@ -4598,8 +4815,8 @@
         </p:nvSpPr>
         <p:spPr>
           <a:xfrm>
-            <a:off x="6959600" y="1371600"/>
-            <a:ext cx="279400" cy="279400"/>
+            <a:off x="6959600" y="1350073"/>
+            <a:ext cx="279400" cy="322453"/>
           </a:xfrm>
           <a:prstGeom prst="rect">
             <a:avLst/>
@@ -4616,14 +4833,21 @@
               <a:lnSpc>
                 <a:spcPct val="112000"/>
               </a:lnSpc>
+              <a:spcBef>
+                <a:spcPts val="0"/>
+              </a:spcBef>
+              <a:spcAft>
+                <a:spcPts val="0"/>
+              </a:spcAft>
             </a:pPr>
             <a:r>
-              <a:rPr sz="1900" b="1" i="0">
+              <a:rPr sz="1900" b="1" i="0" lang="zh-CN" altLang="zh-CN">
                 <a:solidFill>
                   <a:srgbClr val="00B050"/>
                 </a:solidFill>
                 <a:latin typeface="Microsoft YaHei"/>
                 <a:ea typeface="Microsoft YaHei"/>
+                <a:cs typeface="Microsoft YaHei"/>
               </a:rPr>
               <a:t>✓</a:t>
             </a:r>
@@ -4656,14 +4880,21 @@
               <a:lnSpc>
                 <a:spcPct val="112000"/>
               </a:lnSpc>
+              <a:spcBef>
+                <a:spcPts val="0"/>
+              </a:spcBef>
+              <a:spcAft>
+                <a:spcPts val="0"/>
+              </a:spcAft>
             </a:pPr>
             <a:r>
-              <a:rPr sz="1300" b="1" i="0">
+              <a:rPr sz="1300" b="1" i="0" lang="zh-CN" altLang="zh-CN">
                 <a:solidFill>
                   <a:srgbClr val="262626"/>
                 </a:solidFill>
                 <a:latin typeface="Microsoft YaHei"/>
                 <a:ea typeface="Microsoft YaHei"/>
+                <a:cs typeface="Microsoft YaHei"/>
               </a:rPr>
               <a:t>启动集群二期 4000 卡扩容立项</a:t>
             </a:r>
@@ -4710,7 +4941,14 @@
           <a:bodyPr rtlCol="0" anchor="ctr"/>
           <a:lstStyle/>
           <a:p>
-            <a:pPr algn="ctr"/>
+            <a:pPr algn="ctr">
+              <a:spcBef>
+                <a:spcPts val="0"/>
+              </a:spcBef>
+              <a:spcAft>
+                <a:spcPts val="0"/>
+              </a:spcAft>
+            </a:pPr>
           </a:p>
         </p:txBody>
       </p:sp>
@@ -4740,14 +4978,21 @@
               <a:lnSpc>
                 <a:spcPct val="112000"/>
               </a:lnSpc>
+              <a:spcBef>
+                <a:spcPts val="0"/>
+              </a:spcBef>
+              <a:spcAft>
+                <a:spcPts val="0"/>
+              </a:spcAft>
             </a:pPr>
             <a:r>
-              <a:rPr sz="1050" b="1" i="0">
+              <a:rPr sz="1050" b="1" i="0" lang="zh-CN" altLang="zh-CN">
                 <a:solidFill>
                   <a:srgbClr val="1F4E79"/>
                 </a:solidFill>
                 <a:latin typeface="Microsoft YaHei"/>
                 <a:ea typeface="Microsoft YaHei"/>
+                <a:cs typeface="Microsoft YaHei"/>
               </a:rPr>
               <a:t>7 月底前</a:t>
             </a:r>
@@ -4796,7 +5041,14 @@
           <a:bodyPr rtlCol="0" anchor="ctr"/>
           <a:lstStyle/>
           <a:p>
-            <a:pPr algn="ctr"/>
+            <a:pPr algn="ctr">
+              <a:spcBef>
+                <a:spcPts val="0"/>
+              </a:spcBef>
+              <a:spcAft>
+                <a:spcPts val="0"/>
+              </a:spcAft>
+            </a:pPr>
           </a:p>
         </p:txBody>
       </p:sp>
@@ -4842,7 +5094,14 @@
           <a:bodyPr rtlCol="0" anchor="ctr"/>
           <a:lstStyle/>
           <a:p>
-            <a:pPr algn="ctr"/>
+            <a:pPr algn="ctr">
+              <a:spcBef>
+                <a:spcPts val="0"/>
+              </a:spcBef>
+              <a:spcAft>
+                <a:spcPts val="0"/>
+              </a:spcAft>
+            </a:pPr>
           </a:p>
         </p:txBody>
       </p:sp>
@@ -4854,8 +5113,8 @@
         </p:nvSpPr>
         <p:spPr>
           <a:xfrm>
-            <a:off x="6959600" y="2082800"/>
-            <a:ext cx="279400" cy="279400"/>
+            <a:off x="6959600" y="2061273"/>
+            <a:ext cx="279400" cy="322453"/>
           </a:xfrm>
           <a:prstGeom prst="rect">
             <a:avLst/>
@@ -4872,14 +5131,21 @@
               <a:lnSpc>
                 <a:spcPct val="112000"/>
               </a:lnSpc>
+              <a:spcBef>
+                <a:spcPts val="0"/>
+              </a:spcBef>
+              <a:spcAft>
+                <a:spcPts val="0"/>
+              </a:spcAft>
             </a:pPr>
             <a:r>
-              <a:rPr sz="1900" b="1" i="0">
+              <a:rPr sz="1900" b="1" i="0" lang="zh-CN" altLang="zh-CN">
                 <a:solidFill>
                   <a:srgbClr val="00B050"/>
                 </a:solidFill>
                 <a:latin typeface="Microsoft YaHei"/>
                 <a:ea typeface="Microsoft YaHei"/>
+                <a:cs typeface="Microsoft YaHei"/>
               </a:rPr>
               <a:t>✓</a:t>
             </a:r>
@@ -4912,14 +5178,21 @@
               <a:lnSpc>
                 <a:spcPct val="112000"/>
               </a:lnSpc>
+              <a:spcBef>
+                <a:spcPts val="0"/>
+              </a:spcBef>
+              <a:spcAft>
+                <a:spcPts val="0"/>
+              </a:spcAft>
             </a:pPr>
             <a:r>
-              <a:rPr sz="1300" b="1" i="0">
+              <a:rPr sz="1300" b="1" i="0" lang="zh-CN" altLang="zh-CN">
                 <a:solidFill>
                   <a:srgbClr val="262626"/>
                 </a:solidFill>
                 <a:latin typeface="Microsoft YaHei"/>
                 <a:ea typeface="Microsoft YaHei"/>
+                <a:cs typeface="Microsoft YaHei"/>
               </a:rPr>
               <a:t>完成剩余 8% 长尾算子适配攻关</a:t>
             </a:r>
@@ -4966,7 +5239,14 @@
           <a:bodyPr rtlCol="0" anchor="ctr"/>
           <a:lstStyle/>
           <a:p>
-            <a:pPr algn="ctr"/>
+            <a:pPr algn="ctr">
+              <a:spcBef>
+                <a:spcPts val="0"/>
+              </a:spcBef>
+              <a:spcAft>
+                <a:spcPts val="0"/>
+              </a:spcAft>
+            </a:pPr>
           </a:p>
         </p:txBody>
       </p:sp>
@@ -4996,14 +5276,21 @@
               <a:lnSpc>
                 <a:spcPct val="112000"/>
               </a:lnSpc>
+              <a:spcBef>
+                <a:spcPts val="0"/>
+              </a:spcBef>
+              <a:spcAft>
+                <a:spcPts val="0"/>
+              </a:spcAft>
             </a:pPr>
             <a:r>
-              <a:rPr sz="1050" b="1" i="0">
+              <a:rPr sz="1050" b="1" i="0" lang="zh-CN" altLang="zh-CN">
                 <a:solidFill>
                   <a:srgbClr val="1F4E79"/>
                 </a:solidFill>
                 <a:latin typeface="Microsoft YaHei"/>
                 <a:ea typeface="Microsoft YaHei"/>
+                <a:cs typeface="Microsoft YaHei"/>
               </a:rPr>
               <a:t>Q3 季度末</a:t>
             </a:r>
@@ -5052,7 +5339,14 @@
           <a:bodyPr rtlCol="0" anchor="ctr"/>
           <a:lstStyle/>
           <a:p>
-            <a:pPr algn="ctr"/>
+            <a:pPr algn="ctr">
+              <a:spcBef>
+                <a:spcPts val="0"/>
+              </a:spcBef>
+              <a:spcAft>
+                <a:spcPts val="0"/>
+              </a:spcAft>
+            </a:pPr>
           </a:p>
         </p:txBody>
       </p:sp>
@@ -5098,7 +5392,14 @@
           <a:bodyPr rtlCol="0" anchor="ctr"/>
           <a:lstStyle/>
           <a:p>
-            <a:pPr algn="ctr"/>
+            <a:pPr algn="ctr">
+              <a:spcBef>
+                <a:spcPts val="0"/>
+              </a:spcBef>
+              <a:spcAft>
+                <a:spcPts val="0"/>
+              </a:spcAft>
+            </a:pPr>
           </a:p>
         </p:txBody>
       </p:sp>
@@ -5110,8 +5411,8 @@
         </p:nvSpPr>
         <p:spPr>
           <a:xfrm>
-            <a:off x="6959600" y="2794000"/>
-            <a:ext cx="279400" cy="279400"/>
+            <a:off x="6959600" y="2772473"/>
+            <a:ext cx="279400" cy="322453"/>
           </a:xfrm>
           <a:prstGeom prst="rect">
             <a:avLst/>
@@ -5128,14 +5429,21 @@
               <a:lnSpc>
                 <a:spcPct val="112000"/>
               </a:lnSpc>
+              <a:spcBef>
+                <a:spcPts val="0"/>
+              </a:spcBef>
+              <a:spcAft>
+                <a:spcPts val="0"/>
+              </a:spcAft>
             </a:pPr>
             <a:r>
-              <a:rPr sz="1900" b="1" i="0">
+              <a:rPr sz="1900" b="1" i="0" lang="zh-CN" altLang="zh-CN">
                 <a:solidFill>
                   <a:srgbClr val="00B050"/>
                 </a:solidFill>
                 <a:latin typeface="Microsoft YaHei"/>
                 <a:ea typeface="Microsoft YaHei"/>
+                <a:cs typeface="Microsoft YaHei"/>
               </a:rPr>
               <a:t>✓</a:t>
             </a:r>
@@ -5168,14 +5476,21 @@
               <a:lnSpc>
                 <a:spcPct val="112000"/>
               </a:lnSpc>
+              <a:spcBef>
+                <a:spcPts val="0"/>
+              </a:spcBef>
+              <a:spcAft>
+                <a:spcPts val="0"/>
+              </a:spcAft>
             </a:pPr>
             <a:r>
-              <a:rPr sz="1300" b="1" i="0">
+              <a:rPr sz="1300" b="1" i="0" lang="zh-CN" altLang="zh-CN">
                 <a:solidFill>
                   <a:srgbClr val="262626"/>
                 </a:solidFill>
                 <a:latin typeface="Microsoft YaHei"/>
                 <a:ea typeface="Microsoft YaHei"/>
+                <a:cs typeface="Microsoft YaHei"/>
               </a:rPr>
               <a:t>上线智能体平台并接入 3 个业务域</a:t>
             </a:r>
@@ -5222,7 +5537,14 @@
           <a:bodyPr rtlCol="0" anchor="ctr"/>
           <a:lstStyle/>
           <a:p>
-            <a:pPr algn="ctr"/>
+            <a:pPr algn="ctr">
+              <a:spcBef>
+                <a:spcPts val="0"/>
+              </a:spcBef>
+              <a:spcAft>
+                <a:spcPts val="0"/>
+              </a:spcAft>
+            </a:pPr>
           </a:p>
         </p:txBody>
       </p:sp>
@@ -5252,14 +5574,21 @@
               <a:lnSpc>
                 <a:spcPct val="112000"/>
               </a:lnSpc>
+              <a:spcBef>
+                <a:spcPts val="0"/>
+              </a:spcBef>
+              <a:spcAft>
+                <a:spcPts val="0"/>
+              </a:spcAft>
             </a:pPr>
             <a:r>
-              <a:rPr sz="1050" b="1" i="0">
+              <a:rPr sz="1050" b="1" i="0" lang="zh-CN" altLang="zh-CN">
                 <a:solidFill>
                   <a:srgbClr val="1F4E79"/>
                 </a:solidFill>
                 <a:latin typeface="Microsoft YaHei"/>
                 <a:ea typeface="Microsoft YaHei"/>
+                <a:cs typeface="Microsoft YaHei"/>
               </a:rPr>
               <a:t>9/30 上线</a:t>
             </a:r>
@@ -5308,7 +5637,14 @@
           <a:bodyPr rtlCol="0" anchor="ctr"/>
           <a:lstStyle/>
           <a:p>
-            <a:pPr algn="ctr"/>
+            <a:pPr algn="ctr">
+              <a:spcBef>
+                <a:spcPts val="0"/>
+              </a:spcBef>
+              <a:spcAft>
+                <a:spcPts val="0"/>
+              </a:spcAft>
+            </a:pPr>
           </a:p>
         </p:txBody>
       </p:sp>
@@ -5354,7 +5690,14 @@
           <a:bodyPr rtlCol="0" anchor="ctr"/>
           <a:lstStyle/>
           <a:p>
-            <a:pPr algn="ctr"/>
+            <a:pPr algn="ctr">
+              <a:spcBef>
+                <a:spcPts val="0"/>
+              </a:spcBef>
+              <a:spcAft>
+                <a:spcPts val="0"/>
+              </a:spcAft>
+            </a:pPr>
           </a:p>
         </p:txBody>
       </p:sp>
@@ -5366,8 +5709,8 @@
         </p:nvSpPr>
         <p:spPr>
           <a:xfrm>
-            <a:off x="6959600" y="3505200"/>
-            <a:ext cx="279400" cy="279400"/>
+            <a:off x="6959600" y="3483673"/>
+            <a:ext cx="279400" cy="322453"/>
           </a:xfrm>
           <a:prstGeom prst="rect">
             <a:avLst/>
@@ -5384,14 +5727,21 @@
               <a:lnSpc>
                 <a:spcPct val="112000"/>
               </a:lnSpc>
+              <a:spcBef>
+                <a:spcPts val="0"/>
+              </a:spcBef>
+              <a:spcAft>
+                <a:spcPts val="0"/>
+              </a:spcAft>
             </a:pPr>
             <a:r>
-              <a:rPr sz="1900" b="1" i="0">
+              <a:rPr sz="1900" b="1" i="0" lang="zh-CN" altLang="zh-CN">
                 <a:solidFill>
                   <a:srgbClr val="00B050"/>
                 </a:solidFill>
                 <a:latin typeface="Microsoft YaHei"/>
                 <a:ea typeface="Microsoft YaHei"/>
+                <a:cs typeface="Microsoft YaHei"/>
               </a:rPr>
               <a:t>✓</a:t>
             </a:r>
@@ -5424,14 +5774,21 @@
               <a:lnSpc>
                 <a:spcPct val="112000"/>
               </a:lnSpc>
+              <a:spcBef>
+                <a:spcPts val="0"/>
+              </a:spcBef>
+              <a:spcAft>
+                <a:spcPts val="0"/>
+              </a:spcAft>
             </a:pPr>
             <a:r>
-              <a:rPr sz="1300" b="1" i="0">
+              <a:rPr sz="1300" b="1" i="0" lang="zh-CN" altLang="zh-CN">
                 <a:solidFill>
                   <a:srgbClr val="262626"/>
                 </a:solidFill>
                 <a:latin typeface="Microsoft YaHei"/>
                 <a:ea typeface="Microsoft YaHei"/>
+                <a:cs typeface="Microsoft YaHei"/>
               </a:rPr>
               <a:t>发布昇腾云算力服务目录对外运营</a:t>
             </a:r>
@@ -5478,7 +5835,14 @@
           <a:bodyPr rtlCol="0" anchor="ctr"/>
           <a:lstStyle/>
           <a:p>
-            <a:pPr algn="ctr"/>
+            <a:pPr algn="ctr">
+              <a:spcBef>
+                <a:spcPts val="0"/>
+              </a:spcBef>
+              <a:spcAft>
+                <a:spcPts val="0"/>
+              </a:spcAft>
+            </a:pPr>
           </a:p>
         </p:txBody>
       </p:sp>
@@ -5508,14 +5872,21 @@
               <a:lnSpc>
                 <a:spcPct val="112000"/>
               </a:lnSpc>
+              <a:spcBef>
+                <a:spcPts val="0"/>
+              </a:spcBef>
+              <a:spcAft>
+                <a:spcPts val="0"/>
+              </a:spcAft>
             </a:pPr>
             <a:r>
-              <a:rPr sz="1050" b="1" i="0">
+              <a:rPr sz="1050" b="1" i="0" lang="zh-CN" altLang="zh-CN">
                 <a:solidFill>
                   <a:srgbClr val="1F4E79"/>
                 </a:solidFill>
                 <a:latin typeface="Microsoft YaHei"/>
                 <a:ea typeface="Microsoft YaHei"/>
+                <a:cs typeface="Microsoft YaHei"/>
               </a:rPr>
               <a:t>10 月中旬</a:t>
             </a:r>
@@ -5564,7 +5935,14 @@
           <a:bodyPr rtlCol="0" anchor="ctr"/>
           <a:lstStyle/>
           <a:p>
-            <a:pPr algn="ctr"/>
+            <a:pPr algn="ctr">
+              <a:spcBef>
+                <a:spcPts val="0"/>
+              </a:spcBef>
+              <a:spcAft>
+                <a:spcPts val="0"/>
+              </a:spcAft>
+            </a:pPr>
           </a:p>
         </p:txBody>
       </p:sp>
@@ -5576,8 +5954,8 @@
         </p:nvSpPr>
         <p:spPr>
           <a:xfrm>
-            <a:off x="6972300" y="4230254"/>
-            <a:ext cx="254000" cy="254000"/>
+            <a:off x="6837362" y="4156594"/>
+            <a:ext cx="523875" cy="401320"/>
           </a:xfrm>
           <a:prstGeom prst="rect">
             <a:avLst/>
@@ -5594,14 +5972,21 @@
               <a:lnSpc>
                 <a:spcPct val="112000"/>
               </a:lnSpc>
+              <a:spcBef>
+                <a:spcPts val="0"/>
+              </a:spcBef>
+              <a:spcAft>
+                <a:spcPts val="0"/>
+              </a:spcAft>
             </a:pPr>
             <a:r>
-              <a:rPr sz="2400" b="1" i="0">
+              <a:rPr sz="2400" b="1" i="0" lang="zh-CN" altLang="zh-CN">
                 <a:solidFill>
                   <a:srgbClr val="B90A0A"/>
                 </a:solidFill>
                 <a:latin typeface="Microsoft YaHei"/>
                 <a:ea typeface="Microsoft YaHei"/>
+                <a:cs typeface="Microsoft YaHei"/>
               </a:rPr>
               <a:t>⚡</a:t>
             </a:r>
@@ -5634,14 +6019,21 @@
               <a:lnSpc>
                 <a:spcPct val="112000"/>
               </a:lnSpc>
+              <a:spcBef>
+                <a:spcPts val="0"/>
+              </a:spcBef>
+              <a:spcAft>
+                <a:spcPts val="0"/>
+              </a:spcAft>
             </a:pPr>
             <a:r>
-              <a:rPr sz="1400" b="1" i="0">
+              <a:rPr sz="1400" b="1" i="0" lang="zh-CN" altLang="zh-CN">
                 <a:solidFill>
                   <a:srgbClr val="262626"/>
                 </a:solidFill>
                 <a:latin typeface="Microsoft YaHei"/>
                 <a:ea typeface="Microsoft YaHei"/>
+                <a:cs typeface="Microsoft YaHei"/>
               </a:rPr>
               <a:t>资源诉求</a:t>
             </a:r>
@@ -5674,14 +6066,21 @@
               <a:lnSpc>
                 <a:spcPct val="112000"/>
               </a:lnSpc>
+              <a:spcBef>
+                <a:spcPts val="0"/>
+              </a:spcBef>
+              <a:spcAft>
+                <a:spcPts val="0"/>
+              </a:spcAft>
             </a:pPr>
             <a:r>
-              <a:rPr sz="1200" b="0" i="0">
+              <a:rPr sz="1200" b="0" i="0" lang="zh-CN" altLang="zh-CN">
                 <a:solidFill>
                   <a:srgbClr val="262626"/>
                 </a:solidFill>
                 <a:latin typeface="Microsoft YaHei"/>
                 <a:ea typeface="Microsoft YaHei"/>
+                <a:cs typeface="Microsoft YaHei"/>
               </a:rPr>
               <a:t>追加集群二期扩容预算 1.2 亿元; 协调机房 B3 区 600kW 供电改造排期; 增补算子开发工程师 5 人, 7 月到位以保障 Q3 攻关节奏; 申请安全团队专项支持智能体平台等保测评, 8 月底前完成。</a:t>
             </a:r>
@@ -5728,7 +6127,14 @@
           <a:bodyPr rtlCol="0" anchor="ctr"/>
           <a:lstStyle/>
           <a:p>
-            <a:pPr algn="ctr"/>
+            <a:pPr algn="ctr">
+              <a:spcBef>
+                <a:spcPts val="0"/>
+              </a:spcBef>
+              <a:spcAft>
+                <a:spcPts val="0"/>
+              </a:spcAft>
+            </a:pPr>
           </a:p>
         </p:txBody>
       </p:sp>
@@ -5758,14 +6164,21 @@
               <a:lnSpc>
                 <a:spcPct val="112000"/>
               </a:lnSpc>
+              <a:spcBef>
+                <a:spcPts val="0"/>
+              </a:spcBef>
+              <a:spcAft>
+                <a:spcPts val="0"/>
+              </a:spcAft>
             </a:pPr>
             <a:r>
-              <a:rPr sz="2000" b="1" i="0">
+              <a:rPr sz="2000" b="1" i="0" lang="zh-CN" altLang="zh-CN">
                 <a:solidFill>
                   <a:srgbClr val="262626"/>
                 </a:solidFill>
                 <a:latin typeface="Microsoft YaHei"/>
                 <a:ea typeface="Microsoft YaHei"/>
+                <a:cs typeface="Microsoft YaHei"/>
               </a:rPr>
               <a:t>目标: 年底集群利用率 ≥ 90%</a:t>
             </a:r>
